--- a/PPT Template.pptx
+++ b/PPT Template.pptx
@@ -617,10 +617,10 @@
               <a:solidFill>
                 <a:schemeClr val="lt1"/>
               </a:solidFill>
-              <a:latin typeface="Montserrat"/>
-              <a:ea typeface="Montserrat"/>
-              <a:cs typeface="Montserrat"/>
-              <a:sym typeface="Montserrat"/>
+              <a:latin typeface="Inter"/>
+              <a:ea typeface="Inter"/>
+              <a:cs typeface="Inter"/>
+              <a:sym typeface="Inter"/>
             </a:endParaRPr>
           </a:p>
         </p:txBody>
@@ -960,10 +960,10 @@
               <a:solidFill>
                 <a:schemeClr val="lt1"/>
               </a:solidFill>
-              <a:latin typeface="Montserrat"/>
-              <a:ea typeface="Montserrat"/>
-              <a:cs typeface="Montserrat"/>
-              <a:sym typeface="Montserrat"/>
+              <a:latin typeface="Inter"/>
+              <a:ea typeface="Inter"/>
+              <a:cs typeface="Inter"/>
+              <a:sym typeface="Inter"/>
             </a:endParaRPr>
           </a:p>
         </p:txBody>
@@ -1696,10 +1696,10 @@
                   <a:solidFill>
                     <a:srgbClr val="FFFFFF"/>
                   </a:solidFill>
-                  <a:latin typeface="Space Grotesk Medium"/>
-                  <a:ea typeface="Space Grotesk Medium"/>
-                  <a:cs typeface="Space Grotesk Medium"/>
-                  <a:sym typeface="Space Grotesk Medium"/>
+                  <a:latin typeface="Inter"/>
+                  <a:ea typeface="Inter"/>
+                  <a:cs typeface="Inter"/>
+                  <a:sym typeface="Inter"/>
                 </a:rPr>
                 <a:t>Certified by</a:t>
               </a:r>
@@ -1707,10 +1707,10 @@
                 <a:solidFill>
                   <a:srgbClr val="FFFFFF"/>
                 </a:solidFill>
-                <a:latin typeface="Space Grotesk Medium"/>
-                <a:ea typeface="Space Grotesk Medium"/>
-                <a:cs typeface="Space Grotesk Medium"/>
-                <a:sym typeface="Space Grotesk Medium"/>
+                <a:latin typeface="Inter"/>
+                <a:ea typeface="Inter"/>
+                <a:cs typeface="Inter"/>
+                <a:sym typeface="Inter"/>
               </a:endParaRPr>
             </a:p>
           </p:txBody>
@@ -1863,10 +1863,10 @@
                 <a:solidFill>
                   <a:schemeClr val="lt1"/>
                 </a:solidFill>
-                <a:latin typeface="Space Grotesk"/>
-                <a:ea typeface="Space Grotesk"/>
-                <a:cs typeface="Space Grotesk"/>
-                <a:sym typeface="Space Grotesk"/>
+                <a:latin typeface="Inter"/>
+                <a:ea typeface="Inter"/>
+                <a:cs typeface="Inter"/>
+                <a:sym typeface="Inter"/>
               </a:rPr>
               <a:t>www.AccuKnox.com</a:t>
             </a:r>
@@ -1874,10 +1874,10 @@
               <a:solidFill>
                 <a:schemeClr val="lt1"/>
               </a:solidFill>
-              <a:latin typeface="Space Grotesk"/>
-              <a:ea typeface="Space Grotesk"/>
-              <a:cs typeface="Space Grotesk"/>
-              <a:sym typeface="Space Grotesk"/>
+              <a:latin typeface="Inter"/>
+              <a:ea typeface="Inter"/>
+              <a:cs typeface="Inter"/>
+              <a:sym typeface="Inter"/>
             </a:endParaRPr>
           </a:p>
         </p:txBody>
@@ -2172,10 +2172,10 @@
               <a:solidFill>
                 <a:schemeClr val="lt1"/>
               </a:solidFill>
-              <a:latin typeface="Montserrat"/>
-              <a:ea typeface="Montserrat"/>
-              <a:cs typeface="Montserrat"/>
-              <a:sym typeface="Montserrat"/>
+              <a:latin typeface="Inter"/>
+              <a:ea typeface="Inter"/>
+              <a:cs typeface="Inter"/>
+              <a:sym typeface="Inter"/>
             </a:endParaRPr>
           </a:p>
         </p:txBody>
@@ -2459,10 +2459,10 @@
               <a:solidFill>
                 <a:schemeClr val="lt1"/>
               </a:solidFill>
-              <a:latin typeface="Montserrat"/>
-              <a:ea typeface="Montserrat"/>
-              <a:cs typeface="Montserrat"/>
-              <a:sym typeface="Montserrat"/>
+              <a:latin typeface="Inter"/>
+              <a:ea typeface="Inter"/>
+              <a:cs typeface="Inter"/>
+              <a:sym typeface="Inter"/>
             </a:endParaRPr>
           </a:p>
         </p:txBody>
@@ -3453,8 +3453,8 @@
                     <a:tint val="82000"/>
                   </a:schemeClr>
                 </a:solidFill>
-                <a:latin typeface="Space Grotesk Light" pitchFamily="2" charset="77"/>
-                <a:cs typeface="Space Grotesk Light" pitchFamily="2" charset="77"/>
+                <a:latin typeface="Inter" pitchFamily="2" charset="77"/>
+                <a:cs typeface="Inter" pitchFamily="2" charset="77"/>
               </a:defRPr>
             </a:lvl1pPr>
           </a:lstStyle>
@@ -3497,8 +3497,8 @@
                     <a:tint val="82000"/>
                   </a:schemeClr>
                 </a:solidFill>
-                <a:latin typeface="Space Grotesk Light" pitchFamily="2" charset="77"/>
-                <a:cs typeface="Space Grotesk Light" pitchFamily="2" charset="77"/>
+                <a:latin typeface="Inter" pitchFamily="2" charset="77"/>
+                <a:cs typeface="Inter" pitchFamily="2" charset="77"/>
               </a:defRPr>
             </a:lvl1pPr>
           </a:lstStyle>
@@ -3536,8 +3536,8 @@
                     <a:tint val="82000"/>
                   </a:schemeClr>
                 </a:solidFill>
-                <a:latin typeface="Space Grotesk Light" pitchFamily="2" charset="77"/>
-                <a:cs typeface="Space Grotesk Light" pitchFamily="2" charset="77"/>
+                <a:latin typeface="Inter" pitchFamily="2" charset="77"/>
+                <a:cs typeface="Inter" pitchFamily="2" charset="77"/>
               </a:defRPr>
             </a:lvl1pPr>
           </a:lstStyle>
@@ -3586,9 +3586,9 @@
           <a:solidFill>
             <a:schemeClr val="tx1"/>
           </a:solidFill>
-          <a:latin typeface="Space Grotesk Medium" pitchFamily="2" charset="77"/>
+          <a:latin typeface="Inter" pitchFamily="2" charset="77"/>
           <a:ea typeface="+mj-ea"/>
-          <a:cs typeface="Space Grotesk Medium" pitchFamily="2" charset="77"/>
+          <a:cs typeface="Inter" pitchFamily="2" charset="77"/>
         </a:defRPr>
       </a:lvl1pPr>
     </p:titleStyle>
@@ -3606,9 +3606,9 @@
           <a:solidFill>
             <a:schemeClr val="tx1"/>
           </a:solidFill>
-          <a:latin typeface="Space Grotesk Light" pitchFamily="2" charset="77"/>
+          <a:latin typeface="Inter" pitchFamily="2" charset="77"/>
           <a:ea typeface="+mn-ea"/>
-          <a:cs typeface="Space Grotesk Light" pitchFamily="2" charset="77"/>
+          <a:cs typeface="Inter" pitchFamily="2" charset="77"/>
         </a:defRPr>
       </a:lvl1pPr>
       <a:lvl2pPr marL="514350" indent="-171450" algn="l" defTabSz="685800" rtl="0" eaLnBrk="1" latinLnBrk="0" hangingPunct="1">
@@ -3624,9 +3624,9 @@
           <a:solidFill>
             <a:schemeClr val="tx1"/>
           </a:solidFill>
-          <a:latin typeface="Space Grotesk Light" pitchFamily="2" charset="77"/>
+          <a:latin typeface="Inter" pitchFamily="2" charset="77"/>
           <a:ea typeface="+mn-ea"/>
-          <a:cs typeface="Space Grotesk Light" pitchFamily="2" charset="77"/>
+          <a:cs typeface="Inter" pitchFamily="2" charset="77"/>
         </a:defRPr>
       </a:lvl2pPr>
       <a:lvl3pPr marL="857250" indent="-171450" algn="l" defTabSz="685800" rtl="0" eaLnBrk="1" latinLnBrk="0" hangingPunct="1">
@@ -3642,9 +3642,9 @@
           <a:solidFill>
             <a:schemeClr val="tx1"/>
           </a:solidFill>
-          <a:latin typeface="Space Grotesk Light" pitchFamily="2" charset="77"/>
+          <a:latin typeface="Inter" pitchFamily="2" charset="77"/>
           <a:ea typeface="+mn-ea"/>
-          <a:cs typeface="Space Grotesk Light" pitchFamily="2" charset="77"/>
+          <a:cs typeface="Inter" pitchFamily="2" charset="77"/>
         </a:defRPr>
       </a:lvl3pPr>
       <a:lvl4pPr marL="1200150" indent="-171450" algn="l" defTabSz="685800" rtl="0" eaLnBrk="1" latinLnBrk="0" hangingPunct="1">
@@ -3660,9 +3660,9 @@
           <a:solidFill>
             <a:schemeClr val="tx1"/>
           </a:solidFill>
-          <a:latin typeface="Space Grotesk Light" pitchFamily="2" charset="77"/>
+          <a:latin typeface="Inter" pitchFamily="2" charset="77"/>
           <a:ea typeface="+mn-ea"/>
-          <a:cs typeface="Space Grotesk Light" pitchFamily="2" charset="77"/>
+          <a:cs typeface="Inter" pitchFamily="2" charset="77"/>
         </a:defRPr>
       </a:lvl4pPr>
       <a:lvl5pPr marL="1543050" indent="-171450" algn="l" defTabSz="685800" rtl="0" eaLnBrk="1" latinLnBrk="0" hangingPunct="1">
@@ -3678,9 +3678,9 @@
           <a:solidFill>
             <a:schemeClr val="tx1"/>
           </a:solidFill>
-          <a:latin typeface="Space Grotesk Light" pitchFamily="2" charset="77"/>
+          <a:latin typeface="Inter" pitchFamily="2" charset="77"/>
           <a:ea typeface="+mn-ea"/>
-          <a:cs typeface="Space Grotesk Light" pitchFamily="2" charset="77"/>
+          <a:cs typeface="Inter" pitchFamily="2" charset="77"/>
         </a:defRPr>
       </a:lvl5pPr>
       <a:lvl6pPr marL="1885950" indent="-171450" algn="l" defTabSz="685800" rtl="0" eaLnBrk="1" latinLnBrk="0" hangingPunct="1">
